--- a/reports/titanic_presentation.pptx
+++ b/reports/titanic_presentation.pptx
@@ -322,7 +322,7 @@
           <a:p>
             <a:fld id="{5BCAD085-E8A6-8845-BD4E-CB4CCA059FC4}" type="datetimeFigureOut">
               <a:rPr lang="en-US" smtClean="0"/>
-              <a:t>4/27/2026</a:t>
+              <a:t>4/28/2026</a:t>
             </a:fld>
             <a:endParaRPr lang="en-US"/>
           </a:p>
@@ -520,7 +520,7 @@
           <a:p>
             <a:fld id="{5BCAD085-E8A6-8845-BD4E-CB4CCA059FC4}" type="datetimeFigureOut">
               <a:rPr lang="en-US" smtClean="0"/>
-              <a:t>4/27/2026</a:t>
+              <a:t>4/28/2026</a:t>
             </a:fld>
             <a:endParaRPr lang="en-US"/>
           </a:p>
@@ -728,7 +728,7 @@
           <a:p>
             <a:fld id="{5BCAD085-E8A6-8845-BD4E-CB4CCA059FC4}" type="datetimeFigureOut">
               <a:rPr lang="en-US" smtClean="0"/>
-              <a:t>4/27/2026</a:t>
+              <a:t>4/28/2026</a:t>
             </a:fld>
             <a:endParaRPr lang="en-US"/>
           </a:p>
@@ -926,7 +926,7 @@
           <a:p>
             <a:fld id="{5BCAD085-E8A6-8845-BD4E-CB4CCA059FC4}" type="datetimeFigureOut">
               <a:rPr lang="en-US" smtClean="0"/>
-              <a:t>4/27/2026</a:t>
+              <a:t>4/28/2026</a:t>
             </a:fld>
             <a:endParaRPr lang="en-US"/>
           </a:p>
@@ -1201,7 +1201,7 @@
           <a:p>
             <a:fld id="{5BCAD085-E8A6-8845-BD4E-CB4CCA059FC4}" type="datetimeFigureOut">
               <a:rPr lang="en-US" smtClean="0"/>
-              <a:t>4/27/2026</a:t>
+              <a:t>4/28/2026</a:t>
             </a:fld>
             <a:endParaRPr lang="en-US"/>
           </a:p>
@@ -1466,7 +1466,7 @@
           <a:p>
             <a:fld id="{5BCAD085-E8A6-8845-BD4E-CB4CCA059FC4}" type="datetimeFigureOut">
               <a:rPr lang="en-US" smtClean="0"/>
-              <a:t>4/27/2026</a:t>
+              <a:t>4/28/2026</a:t>
             </a:fld>
             <a:endParaRPr lang="en-US"/>
           </a:p>
@@ -1878,7 +1878,7 @@
           <a:p>
             <a:fld id="{5BCAD085-E8A6-8845-BD4E-CB4CCA059FC4}" type="datetimeFigureOut">
               <a:rPr lang="en-US" smtClean="0"/>
-              <a:t>4/27/2026</a:t>
+              <a:t>4/28/2026</a:t>
             </a:fld>
             <a:endParaRPr lang="en-US"/>
           </a:p>
@@ -2019,7 +2019,7 @@
           <a:p>
             <a:fld id="{5BCAD085-E8A6-8845-BD4E-CB4CCA059FC4}" type="datetimeFigureOut">
               <a:rPr lang="en-US" smtClean="0"/>
-              <a:t>4/27/2026</a:t>
+              <a:t>4/28/2026</a:t>
             </a:fld>
             <a:endParaRPr lang="en-US"/>
           </a:p>
@@ -2132,7 +2132,7 @@
           <a:p>
             <a:fld id="{5BCAD085-E8A6-8845-BD4E-CB4CCA059FC4}" type="datetimeFigureOut">
               <a:rPr lang="en-US" smtClean="0"/>
-              <a:t>4/27/2026</a:t>
+              <a:t>4/28/2026</a:t>
             </a:fld>
             <a:endParaRPr lang="en-US"/>
           </a:p>
@@ -2443,7 +2443,7 @@
           <a:p>
             <a:fld id="{5BCAD085-E8A6-8845-BD4E-CB4CCA059FC4}" type="datetimeFigureOut">
               <a:rPr lang="en-US" smtClean="0"/>
-              <a:t>4/27/2026</a:t>
+              <a:t>4/28/2026</a:t>
             </a:fld>
             <a:endParaRPr lang="en-US"/>
           </a:p>
@@ -2731,7 +2731,7 @@
           <a:p>
             <a:fld id="{5BCAD085-E8A6-8845-BD4E-CB4CCA059FC4}" type="datetimeFigureOut">
               <a:rPr lang="en-US" smtClean="0"/>
-              <a:t>4/27/2026</a:t>
+              <a:t>4/28/2026</a:t>
             </a:fld>
             <a:endParaRPr lang="en-US"/>
           </a:p>
@@ -2972,7 +2972,7 @@
           <a:p>
             <a:fld id="{5BCAD085-E8A6-8845-BD4E-CB4CCA059FC4}" type="datetimeFigureOut">
               <a:rPr lang="en-US" smtClean="0"/>
-              <a:t>4/27/2026</a:t>
+              <a:t>4/28/2026</a:t>
             </a:fld>
             <a:endParaRPr lang="en-US"/>
           </a:p>
@@ -5629,8 +5629,10 @@
           <a:lstStyle/>
           <a:p>
             <a:r>
+              <a:rPr dirty="0" err="1"/>
               <a:t>한계</a:t>
             </a:r>
+            <a:endParaRPr dirty="0"/>
           </a:p>
         </p:txBody>
       </p:sp>
@@ -6072,7 +6074,12 @@
             <p:ph type="title"/>
           </p:nvPr>
         </p:nvSpPr>
-        <p:spPr/>
+        <p:spPr>
+          <a:xfrm>
+            <a:off x="409903" y="-122829"/>
+            <a:ext cx="7886700" cy="1325563"/>
+          </a:xfrm>
+        </p:spPr>
         <p:txBody>
           <a:bodyPr/>
           <a:lstStyle/>
@@ -6099,8 +6106,8 @@
         </p:nvSpPr>
         <p:spPr>
           <a:xfrm>
-            <a:off x="628650" y="1537505"/>
-            <a:ext cx="8105447" cy="3778278"/>
+            <a:off x="409903" y="1202734"/>
+            <a:ext cx="8105447" cy="5954002"/>
           </a:xfrm>
           <a:prstGeom prst="rect">
             <a:avLst/>
@@ -6121,10 +6128,10 @@
               <a:buChar char="•"/>
             </a:pPr>
             <a:r>
-              <a:rPr lang="ko-KR" altLang="en-US" dirty="0"/>
+              <a:rPr lang="ko-KR" altLang="en-US" sz="1600" dirty="0"/>
               <a:t>프로젝트 개요</a:t>
             </a:r>
-            <a:endParaRPr lang="en-US" altLang="ko-KR" dirty="0"/>
+            <a:endParaRPr lang="en-US" altLang="ko-KR" sz="1600" dirty="0"/>
           </a:p>
           <a:p>
             <a:pPr marL="285750" indent="-285750">
@@ -6135,10 +6142,10 @@
               <a:buChar char="•"/>
             </a:pPr>
             <a:r>
-              <a:rPr lang="ko-KR" altLang="en-US" dirty="0"/>
+              <a:rPr lang="ko-KR" altLang="en-US" sz="1600" dirty="0"/>
               <a:t>데이터 소개</a:t>
             </a:r>
-            <a:endParaRPr lang="en-US" altLang="ko-KR" dirty="0"/>
+            <a:endParaRPr lang="en-US" altLang="ko-KR" sz="1600" dirty="0"/>
           </a:p>
           <a:p>
             <a:pPr marL="285750" indent="-285750">
@@ -6149,10 +6156,10 @@
               <a:buChar char="•"/>
             </a:pPr>
             <a:r>
-              <a:rPr lang="ko-KR" altLang="en-US" dirty="0"/>
+              <a:rPr lang="ko-KR" altLang="en-US" sz="1600" dirty="0"/>
               <a:t>문제 정의</a:t>
             </a:r>
-            <a:endParaRPr lang="en-US" altLang="ko-KR" dirty="0"/>
+            <a:endParaRPr lang="en-US" altLang="ko-KR" sz="1600" dirty="0"/>
           </a:p>
           <a:p>
             <a:pPr marL="285750" indent="-285750">
@@ -6163,7 +6170,7 @@
               <a:buChar char="•"/>
             </a:pPr>
             <a:r>
-              <a:rPr lang="en-US" altLang="ko-KR" dirty="0"/>
+              <a:rPr lang="en-US" altLang="ko-KR" sz="1600" dirty="0"/>
               <a:t>Info</a:t>
             </a:r>
           </a:p>
@@ -6176,14 +6183,14 @@
               <a:buChar char="•"/>
             </a:pPr>
             <a:r>
-              <a:rPr lang="ko-KR" altLang="en-US" dirty="0" err="1"/>
+              <a:rPr lang="ko-KR" altLang="en-US" sz="1600" dirty="0" err="1"/>
               <a:t>결측값</a:t>
             </a:r>
             <a:r>
-              <a:rPr lang="ko-KR" altLang="en-US" dirty="0"/>
+              <a:rPr lang="ko-KR" altLang="en-US" sz="1600" dirty="0"/>
               <a:t> 처리</a:t>
             </a:r>
-            <a:endParaRPr lang="en-US" altLang="ko-KR" dirty="0"/>
+            <a:endParaRPr lang="en-US" altLang="ko-KR" sz="1600" dirty="0"/>
           </a:p>
           <a:p>
             <a:pPr marL="285750" indent="-285750">
@@ -6194,19 +6201,19 @@
               <a:buChar char="•"/>
             </a:pPr>
             <a:r>
-              <a:rPr lang="en-US" altLang="ko-KR" dirty="0"/>
+              <a:rPr lang="en-US" altLang="ko-KR" sz="1600" dirty="0"/>
               <a:t>EDA (</a:t>
             </a:r>
             <a:r>
-              <a:rPr lang="ko-KR" altLang="en-US" dirty="0" err="1"/>
+              <a:rPr lang="ko-KR" altLang="en-US" sz="1600" dirty="0" err="1"/>
               <a:t>단변량</a:t>
             </a:r>
             <a:r>
-              <a:rPr lang="ko-KR" altLang="en-US" dirty="0"/>
+              <a:rPr lang="ko-KR" altLang="en-US" sz="1600" dirty="0"/>
               <a:t> 분석</a:t>
             </a:r>
             <a:r>
-              <a:rPr lang="en-US" altLang="ko-KR" dirty="0"/>
+              <a:rPr lang="en-US" altLang="ko-KR" sz="1600" dirty="0"/>
               <a:t>)</a:t>
             </a:r>
           </a:p>
@@ -6219,19 +6226,19 @@
               <a:buChar char="•"/>
             </a:pPr>
             <a:r>
-              <a:rPr lang="en-US" altLang="ko-KR" dirty="0"/>
+              <a:rPr lang="en-US" altLang="ko-KR" sz="1600" dirty="0"/>
               <a:t>EDA (</a:t>
             </a:r>
             <a:r>
-              <a:rPr lang="ko-KR" altLang="en-US" dirty="0" err="1"/>
+              <a:rPr lang="ko-KR" altLang="en-US" sz="1600" dirty="0" err="1"/>
               <a:t>이변량</a:t>
             </a:r>
             <a:r>
-              <a:rPr lang="ko-KR" altLang="en-US" dirty="0"/>
+              <a:rPr lang="ko-KR" altLang="en-US" sz="1600" dirty="0"/>
               <a:t> 분석</a:t>
             </a:r>
             <a:r>
-              <a:rPr lang="en-US" altLang="ko-KR" dirty="0"/>
+              <a:rPr lang="en-US" altLang="ko-KR" sz="1600" dirty="0"/>
               <a:t>)</a:t>
             </a:r>
           </a:p>
@@ -6244,10 +6251,10 @@
               <a:buChar char="•"/>
             </a:pPr>
             <a:r>
-              <a:rPr lang="ko-KR" altLang="en-US" dirty="0"/>
+              <a:rPr lang="ko-KR" altLang="en-US" sz="1600" dirty="0"/>
               <a:t>통계 검정</a:t>
             </a:r>
-            <a:endParaRPr lang="en-US" altLang="ko-KR" dirty="0"/>
+            <a:endParaRPr lang="en-US" altLang="ko-KR" sz="1600" dirty="0"/>
           </a:p>
           <a:p>
             <a:pPr marL="285750" indent="-285750">
@@ -6257,7 +6264,112 @@
               <a:buFont typeface="Arial" panose="020B0604020202020204" pitchFamily="34" charset="0"/>
               <a:buChar char="•"/>
             </a:pPr>
-            <a:endParaRPr lang="en-US" altLang="ko-KR" dirty="0"/>
+            <a:r>
+              <a:rPr lang="ko-KR" altLang="en-US" sz="1600" dirty="0" err="1"/>
+              <a:t>Feature</a:t>
+            </a:r>
+            <a:r>
+              <a:rPr lang="ko-KR" altLang="en-US" sz="1600" dirty="0"/>
+              <a:t> Engineering</a:t>
+            </a:r>
+            <a:endParaRPr lang="en-US" altLang="ko-KR" sz="1600" dirty="0"/>
+          </a:p>
+          <a:p>
+            <a:pPr marL="285750" indent="-285750">
+              <a:lnSpc>
+                <a:spcPct val="150000"/>
+              </a:lnSpc>
+              <a:buFont typeface="Arial" panose="020B0604020202020204" pitchFamily="34" charset="0"/>
+              <a:buChar char="•"/>
+            </a:pPr>
+            <a:r>
+              <a:rPr lang="ko-KR" altLang="en-US" sz="1600" dirty="0"/>
+              <a:t>모델링</a:t>
+            </a:r>
+            <a:endParaRPr lang="en-US" altLang="ko-KR" sz="1600" dirty="0"/>
+          </a:p>
+          <a:p>
+            <a:pPr marL="285750" indent="-285750">
+              <a:lnSpc>
+                <a:spcPct val="150000"/>
+              </a:lnSpc>
+              <a:buFont typeface="Arial" panose="020B0604020202020204" pitchFamily="34" charset="0"/>
+              <a:buChar char="•"/>
+            </a:pPr>
+            <a:r>
+              <a:rPr lang="ko-KR" altLang="en-US" sz="1600" dirty="0" err="1"/>
+              <a:t>Feature</a:t>
+            </a:r>
+            <a:r>
+              <a:rPr lang="ko-KR" altLang="en-US" sz="1600" dirty="0"/>
+              <a:t> </a:t>
+            </a:r>
+            <a:r>
+              <a:rPr lang="ko-KR" altLang="en-US" sz="1600" dirty="0" err="1"/>
+              <a:t>Importance</a:t>
+            </a:r>
+            <a:endParaRPr lang="en-US" altLang="ko-KR" sz="1600" dirty="0"/>
+          </a:p>
+          <a:p>
+            <a:pPr marL="285750" indent="-285750">
+              <a:lnSpc>
+                <a:spcPct val="150000"/>
+              </a:lnSpc>
+              <a:buFont typeface="Arial" panose="020B0604020202020204" pitchFamily="34" charset="0"/>
+              <a:buChar char="•"/>
+            </a:pPr>
+            <a:r>
+              <a:rPr lang="ko-KR" altLang="en-US" sz="1600" dirty="0"/>
+              <a:t>결과</a:t>
+            </a:r>
+            <a:endParaRPr lang="en-US" altLang="ko-KR" sz="1600" dirty="0"/>
+          </a:p>
+          <a:p>
+            <a:pPr marL="285750" indent="-285750">
+              <a:lnSpc>
+                <a:spcPct val="150000"/>
+              </a:lnSpc>
+              <a:buFont typeface="Arial" panose="020B0604020202020204" pitchFamily="34" charset="0"/>
+              <a:buChar char="•"/>
+            </a:pPr>
+            <a:r>
+              <a:rPr lang="ko-KR" altLang="en-US" sz="1600" dirty="0"/>
+              <a:t>한계</a:t>
+            </a:r>
+            <a:endParaRPr lang="en-US" altLang="ko-KR" sz="1600" dirty="0"/>
+          </a:p>
+          <a:p>
+            <a:pPr marL="285750" indent="-285750">
+              <a:lnSpc>
+                <a:spcPct val="150000"/>
+              </a:lnSpc>
+              <a:buFont typeface="Arial" panose="020B0604020202020204" pitchFamily="34" charset="0"/>
+              <a:buChar char="•"/>
+            </a:pPr>
+            <a:r>
+              <a:rPr lang="ko-KR" altLang="en-US" sz="1600" dirty="0"/>
+              <a:t>결론</a:t>
+            </a:r>
+          </a:p>
+          <a:p>
+            <a:pPr marL="285750" indent="-285750">
+              <a:lnSpc>
+                <a:spcPct val="150000"/>
+              </a:lnSpc>
+              <a:buFont typeface="Arial" panose="020B0604020202020204" pitchFamily="34" charset="0"/>
+              <a:buChar char="•"/>
+            </a:pPr>
+            <a:endParaRPr lang="en-US" altLang="ko-KR" sz="1600" dirty="0"/>
+          </a:p>
+          <a:p>
+            <a:pPr marL="285750" indent="-285750">
+              <a:lnSpc>
+                <a:spcPct val="150000"/>
+              </a:lnSpc>
+              <a:buFont typeface="Arial" panose="020B0604020202020204" pitchFamily="34" charset="0"/>
+              <a:buChar char="•"/>
+            </a:pPr>
+            <a:endParaRPr lang="en-US" altLang="ko-KR" sz="1600" dirty="0"/>
           </a:p>
         </p:txBody>
       </p:sp>
